--- a/media/resources/files/ButunSandardyJanaOnduktardy_Koboytuu_Boluu_XjanaO_GwWot6W.pptx
+++ b/media/resources/files/ButunSandardyJanaOnduktardy_Koboytuu_Boluu_XjanaO_GwWot6W.pptx
@@ -8433,7 +8433,7 @@
                 <a:ea typeface="+mn-ea"/>
                 <a:cs typeface="+mn-cs"/>
               </a:rPr>
-              <a:t>Турдуу пикирлер учун ыраазычылык билдиребиз.</a:t>
+              <a:t>Түрдүү пикирлер үчүн ыраазычылык билдиребиз.</a:t>
             </a:r>
           </a:p>
           <a:p>

--- a/media/resources/files/ButunSandardyJanaOnduktardy_Koboytuu_Boluu_XjanaO_GwWot6W.pptx
+++ b/media/resources/files/ButunSandardyJanaOnduktardy_Koboytuu_Boluu_XjanaO_GwWot6W.pptx
@@ -3945,7 +3945,7 @@
                 <a:ea typeface="+mn-ea"/>
                 <a:cs typeface="Arial" panose="020B0604020202020204" pitchFamily="34" charset="0"/>
               </a:rPr>
-              <a:t>Мугалим үчүн жооп баракчасы жана таратма материалдар камтылган.</a:t>
+              <a:t>Мугалим үчүн жооп барагы жана таратма материалдар бар.</a:t>
             </a:r>
           </a:p>
           <a:p>
@@ -4014,7 +4014,7 @@
                 <a:ea typeface="+mn-ea"/>
                 <a:cs typeface="Arial" panose="020B0604020202020204" pitchFamily="34" charset="0"/>
               </a:rPr>
-              <a:t>Кайсы команда туура жооп бергенине жараша '</a:t>
+              <a:t>Туура жооп берген командага жараша «</a:t>
             </a:r>
             <a:r>
               <a:rPr kumimoji="0" lang="en-GB" sz="2000" b="0" i="0" u="sng" strike="noStrike" kern="1200" cap="none" spc="0" normalizeH="0" baseline="0" noProof="0" dirty="0">
@@ -4031,7 +4031,7 @@
                 <a:ea typeface="+mn-ea"/>
                 <a:cs typeface="Arial" panose="020B0604020202020204" pitchFamily="34" charset="0"/>
               </a:rPr>
-              <a:t>X' </a:t>
+              <a:t>X» </a:t>
             </a:r>
             <a:r>
               <a:rPr kumimoji="0" lang="ru-RU" sz="2000" b="0" i="0" u="sng" strike="noStrike" kern="1200" cap="none" spc="0" normalizeH="0" baseline="0" noProof="0" dirty="0">
@@ -4048,7 +4048,7 @@
                 <a:ea typeface="+mn-ea"/>
                 <a:cs typeface="Arial" panose="020B0604020202020204" pitchFamily="34" charset="0"/>
               </a:rPr>
-              <a:t>же '</a:t>
+              <a:t>же «</a:t>
             </a:r>
             <a:r>
               <a:rPr kumimoji="0" lang="en-GB" sz="2000" b="0" i="0" u="sng" strike="noStrike" kern="1200" cap="none" spc="0" normalizeH="0" baseline="0" noProof="0" dirty="0">
@@ -4065,7 +4065,7 @@
                 <a:ea typeface="+mn-ea"/>
                 <a:cs typeface="Arial" panose="020B0604020202020204" pitchFamily="34" charset="0"/>
               </a:rPr>
-              <a:t>O' </a:t>
+              <a:t>O» </a:t>
             </a:r>
             <a:r>
               <a:rPr kumimoji="0" lang="ru-RU" sz="2000" b="0" i="0" u="sng" strike="noStrike" kern="1200" cap="none" spc="0" normalizeH="0" baseline="0" noProof="0" dirty="0">
@@ -4082,7 +4082,7 @@
                 <a:ea typeface="+mn-ea"/>
                 <a:cs typeface="Arial" panose="020B0604020202020204" pitchFamily="34" charset="0"/>
               </a:rPr>
-              <a:t>баскычын басыңыз/тийип коюңуз</a:t>
+              <a:t>баскычын басыңыз</a:t>
             </a:r>
             <a:r>
               <a:rPr kumimoji="0" lang="en-GB" sz="2000" b="0" i="0" u="none" strike="noStrike" kern="1200" cap="none" spc="0" normalizeH="0" baseline="0" noProof="0" dirty="0">
@@ -4721,7 +4721,7 @@
             <a:pPr algn="ctr"/>
             <a:r>
               <a:rPr lang="en-GB" sz="5400" dirty="0"/>
-              <a:t>3 × 1.9</a:t>
+              <a:t>3 × 1,9</a:t>
             </a:r>
           </a:p>
         </p:txBody>
@@ -4757,7 +4757,7 @@
             <a:pPr algn="ctr"/>
             <a:r>
               <a:rPr lang="en-GB" sz="5400" dirty="0"/>
-              <a:t>2.09 × 4</a:t>
+              <a:t>2,09 × 4</a:t>
             </a:r>
           </a:p>
         </p:txBody>
@@ -4793,7 +4793,7 @@
             <a:pPr algn="ctr"/>
             <a:r>
               <a:rPr lang="en-GB" sz="5400" dirty="0"/>
-              <a:t>6 × 1.12</a:t>
+              <a:t>6 × 1,12</a:t>
             </a:r>
           </a:p>
         </p:txBody>
@@ -4829,7 +4829,7 @@
             <a:pPr algn="ctr"/>
             <a:r>
               <a:rPr lang="en-GB" sz="5400" dirty="0"/>
-              <a:t>2 × 3.72</a:t>
+              <a:t>2 × 3,72</a:t>
             </a:r>
           </a:p>
         </p:txBody>
@@ -4865,7 +4865,7 @@
             <a:pPr algn="ctr"/>
             <a:r>
               <a:rPr lang="en-GB" sz="5400" dirty="0"/>
-              <a:t>6 × 1.3</a:t>
+              <a:t>6 × 1,3</a:t>
             </a:r>
           </a:p>
         </p:txBody>
@@ -4901,7 +4901,7 @@
             <a:pPr algn="ctr"/>
             <a:r>
               <a:rPr lang="en-GB" sz="5400" dirty="0"/>
-              <a:t>9.2 ÷ 2</a:t>
+              <a:t>9,2 ÷ 2</a:t>
             </a:r>
           </a:p>
         </p:txBody>
@@ -4937,7 +4937,7 @@
             <a:pPr algn="ctr"/>
             <a:r>
               <a:rPr lang="en-GB" sz="5400" dirty="0"/>
-              <a:t>0.56 ÷ 7</a:t>
+              <a:t>0,56 ÷ 7</a:t>
             </a:r>
           </a:p>
         </p:txBody>
@@ -4973,7 +4973,7 @@
             <a:pPr algn="ctr"/>
             <a:r>
               <a:rPr lang="en-GB" sz="5400" dirty="0"/>
-              <a:t>6 ÷ 0.5</a:t>
+              <a:t>6 ÷ 0,5</a:t>
             </a:r>
           </a:p>
         </p:txBody>
@@ -5009,7 +5009,7 @@
             <a:pPr algn="ctr"/>
             <a:r>
               <a:rPr lang="en-GB" sz="5400" dirty="0"/>
-              <a:t>6 ÷ 1.2</a:t>
+              <a:t>6 ÷ 1,2</a:t>
             </a:r>
           </a:p>
         </p:txBody>
